--- a/backend/template.pptx
+++ b/backend/template.pptx
@@ -204,7 +204,7 @@
           <a:p>
             <a:fld id="{917A5B62-81B0-44F2-B1FB-A5F59081F339}" type="datetimeFigureOut">
               <a:rPr lang="ko-KR" altLang="en-US" smtClean="0"/>
-              <a:t>2026-03-24</a:t>
+              <a:t>2026. 3. 25.</a:t>
             </a:fld>
             <a:endParaRPr lang="ko-KR" altLang="en-US"/>
           </a:p>
@@ -892,7 +892,7 @@
         <p:spPr>
           <a:xfrm>
             <a:off x="736092" y="2037534"/>
-            <a:ext cx="7671816" cy="3477875"/>
+            <a:ext cx="7671816" cy="400110"/>
           </a:xfrm>
           <a:prstGeom prst="rect">
             <a:avLst/>
@@ -907,46 +907,10 @@
           <a:p>
             <a:pPr marR="0" algn="just" rtl="0"/>
             <a:r>
-              <a:rPr lang="en-US" altLang="ko-KR" sz="3000" b="0" i="0" u="none" strike="noStrike" baseline="30000" dirty="0">
+              <a:rPr lang="en-US" altLang="ko-KR" sz="3000" baseline="30000" dirty="0">
                 <a:latin typeface="Times New Roman" panose="02020603050405020304" pitchFamily="18" charset="0"/>
               </a:rPr>
-              <a:t>For a story to be considered </a:t>
-            </a:r>
-            <a:r>
-              <a:rPr lang="ko-KR" altLang="en-US" sz="3000" b="0" i="0" u="none" strike="noStrike" baseline="30000" dirty="0">
-                <a:latin typeface="Times New Roman" panose="02020603050405020304" pitchFamily="18" charset="0"/>
-              </a:rPr>
-              <a:t>‘</a:t>
-            </a:r>
-            <a:r>
-              <a:rPr lang="en-US" altLang="ko-KR" sz="3000" b="0" i="0" u="none" strike="noStrike" baseline="30000" dirty="0">
-                <a:latin typeface="Times New Roman" panose="02020603050405020304" pitchFamily="18" charset="0"/>
-              </a:rPr>
-              <a:t>fantasy,</a:t>
-            </a:r>
-            <a:r>
-              <a:rPr lang="ko-KR" altLang="en-US" sz="3000" b="0" i="0" u="none" strike="noStrike" baseline="30000" dirty="0">
-                <a:latin typeface="Times New Roman" panose="02020603050405020304" pitchFamily="18" charset="0"/>
-              </a:rPr>
-              <a:t>’ </a:t>
-            </a:r>
-            <a:r>
-              <a:rPr lang="en-US" altLang="ko-KR" sz="3000" b="0" i="0" u="none" strike="noStrike" baseline="30000" dirty="0">
-                <a:latin typeface="Times New Roman" panose="02020603050405020304" pitchFamily="18" charset="0"/>
-              </a:rPr>
-              <a:t>it needs to contain some sort of magic system, in short, things that occur or exist in your story that cannot exist in the real world. These include elements of sorcery, witchcraft, and enchantment; fantastical creatures and the supernatural; or advanced</a:t>
-            </a:r>
-            <a:r>
-              <a:rPr lang="ko-KR" altLang="en-US" sz="3000" b="0" i="0" u="none" strike="noStrike" baseline="30000" dirty="0">
-                <a:latin typeface="Times New Roman" panose="02020603050405020304" pitchFamily="18" charset="0"/>
-              </a:rPr>
-              <a:t> </a:t>
-            </a:r>
-            <a:r>
-              <a:rPr lang="en-US" altLang="ko-KR" sz="3000" b="0" i="0" u="none" strike="noStrike" baseline="30000" dirty="0">
-                <a:latin typeface="Times New Roman" panose="02020603050405020304" pitchFamily="18" charset="0"/>
-              </a:rPr>
-              <a:t>abilities or powers. Basically, anything with no basis in real-world evidence or logic can be considered magic. This is where you can really set your story apart from others in (A) the genre. If your magic system is unique and imaginative, your novel has a point of difference. An innovative, intriguing magic system is often the key to helping your novel stand out in the saturated fantasy market. Your magic system should play a key part in your story.</a:t>
+              <a:t>template</a:t>
             </a:r>
             <a:endParaRPr lang="ko-KR" altLang="en-US" sz="3000" b="0" i="0" u="none" strike="noStrike" baseline="30000" dirty="0">
               <a:latin typeface="Times New Roman" panose="02020603050405020304" pitchFamily="18" charset="0"/>
@@ -1132,7 +1096,7 @@
         <p:spPr>
           <a:xfrm>
             <a:off x="420624" y="1532388"/>
-            <a:ext cx="7909560" cy="2862322"/>
+            <a:ext cx="7909560" cy="553998"/>
           </a:xfrm>
           <a:prstGeom prst="rect">
             <a:avLst/>
@@ -1149,212 +1113,10 @@
               <a:rPr lang="en-US" altLang="ko-KR" sz="3000" b="0" i="0" u="none" strike="noStrike" baseline="30000" dirty="0">
                 <a:latin typeface="Times New Roman" panose="02020603050405020304" pitchFamily="18" charset="0"/>
               </a:rPr>
-              <a:t>1. Which of the following is the best title for the passage?</a:t>
-            </a:r>
-            <a:r>
-              <a:rPr lang="ko-KR" altLang="en-US" sz="3000" b="0" i="0" u="none" strike="noStrike" baseline="30000" dirty="0">
-                <a:latin typeface="AdobeMyungjoStd-Medium"/>
-              </a:rPr>
-              <a:t>	</a:t>
+              <a:t>template</a:t>
             </a:r>
             <a:endParaRPr lang="ko-KR" altLang="en-US" sz="3000" b="0" i="0" u="none" strike="noStrike" baseline="0" dirty="0">
               <a:latin typeface="AdobeMyungjoStd-Medium"/>
-            </a:endParaRPr>
-          </a:p>
-          <a:p>
-            <a:r>
-              <a:rPr lang="ko-KR" altLang="en-US" sz="3000" b="0" i="0" u="none" strike="noStrike" baseline="0" dirty="0">
-                <a:latin typeface="AdobeMyungjoStd-Medium"/>
-              </a:rPr>
-              <a:t>	</a:t>
-            </a:r>
-          </a:p>
-          <a:p>
-            <a:r>
-              <a:rPr lang="ko-KR" altLang="en-US" sz="3000" b="0" i="0" u="none" strike="noStrike" baseline="30000" dirty="0">
-                <a:latin typeface="AdobeMyungjoStd-Medium"/>
-              </a:rPr>
-              <a:t>①</a:t>
-            </a:r>
-            <a:r>
-              <a:rPr lang="ko-KR" altLang="en-US" sz="3000" b="0" i="0" u="none" strike="noStrike" baseline="30000" dirty="0">
-                <a:latin typeface="Times New Roman" panose="02020603050405020304" pitchFamily="18" charset="0"/>
-              </a:rPr>
-              <a:t> </a:t>
-            </a:r>
-            <a:r>
-              <a:rPr lang="en-US" altLang="ko-KR" sz="3000" b="0" i="0" u="none" strike="noStrike" baseline="30000" dirty="0">
-                <a:latin typeface="Times New Roman" panose="02020603050405020304" pitchFamily="18" charset="0"/>
-              </a:rPr>
-              <a:t>The Similarity Between Magic and Science</a:t>
-            </a:r>
-            <a:r>
-              <a:rPr lang="ko-KR" altLang="en-US" sz="3000" b="0" i="0" u="none" strike="noStrike" baseline="30000" dirty="0">
-                <a:latin typeface="AdobeMyungjoStd-Medium"/>
-              </a:rPr>
-              <a:t>	</a:t>
-            </a:r>
-            <a:endParaRPr lang="ko-KR" altLang="en-US" sz="3000" b="0" i="0" u="none" strike="noStrike" baseline="0" dirty="0">
-              <a:latin typeface="AdobeMyungjoStd-Medium"/>
-            </a:endParaRPr>
-          </a:p>
-          <a:p>
-            <a:r>
-              <a:rPr lang="ko-KR" altLang="en-US" sz="3000" b="0" i="0" u="none" strike="noStrike" baseline="30000" dirty="0">
-                <a:latin typeface="AdobeMyungjoStd-Medium"/>
-              </a:rPr>
-              <a:t>②</a:t>
-            </a:r>
-            <a:r>
-              <a:rPr lang="ko-KR" altLang="en-US" sz="3000" b="0" i="0" u="none" strike="noStrike" baseline="30000" dirty="0">
-                <a:latin typeface="Times New Roman" panose="02020603050405020304" pitchFamily="18" charset="0"/>
-              </a:rPr>
-              <a:t> </a:t>
-            </a:r>
-            <a:r>
-              <a:rPr lang="en-US" altLang="ko-KR" sz="3000" b="0" i="0" u="none" strike="noStrike" baseline="30000" dirty="0">
-                <a:latin typeface="Times New Roman" panose="02020603050405020304" pitchFamily="18" charset="0"/>
-              </a:rPr>
-              <a:t>Various Reasons Readers Buy Books</a:t>
-            </a:r>
-            <a:r>
-              <a:rPr lang="ko-KR" altLang="en-US" sz="3000" b="0" i="0" u="none" strike="noStrike" baseline="30000" dirty="0">
-                <a:latin typeface="AdobeMyungjoStd-Medium"/>
-              </a:rPr>
-              <a:t>	</a:t>
-            </a:r>
-            <a:endParaRPr lang="ko-KR" altLang="en-US" sz="3000" b="0" i="0" u="none" strike="noStrike" baseline="0" dirty="0">
-              <a:latin typeface="AdobeMyungjoStd-Medium"/>
-            </a:endParaRPr>
-          </a:p>
-          <a:p>
-            <a:r>
-              <a:rPr lang="ko-KR" altLang="en-US" sz="3000" b="0" i="0" u="none" strike="noStrike" baseline="30000" dirty="0">
-                <a:latin typeface="AdobeMyungjoStd-Medium"/>
-              </a:rPr>
-              <a:t>③</a:t>
-            </a:r>
-            <a:r>
-              <a:rPr lang="ko-KR" altLang="en-US" sz="3000" b="0" i="0" u="none" strike="noStrike" baseline="30000" dirty="0">
-                <a:latin typeface="Times New Roman" panose="02020603050405020304" pitchFamily="18" charset="0"/>
-              </a:rPr>
-              <a:t> </a:t>
-            </a:r>
-            <a:r>
-              <a:rPr lang="en-US" altLang="ko-KR" sz="3000" b="0" i="0" u="none" strike="noStrike" baseline="30000" dirty="0">
-                <a:latin typeface="Times New Roman" panose="02020603050405020304" pitchFamily="18" charset="0"/>
-              </a:rPr>
-              <a:t>A Fantasy World: Something Never Experienced</a:t>
-            </a:r>
-            <a:r>
-              <a:rPr lang="ko-KR" altLang="en-US" sz="3000" b="0" i="0" u="none" strike="noStrike" baseline="30000" dirty="0">
-                <a:latin typeface="AdobeMyungjoStd-Medium"/>
-              </a:rPr>
-              <a:t>	</a:t>
-            </a:r>
-            <a:endParaRPr lang="ko-KR" altLang="en-US" sz="3000" b="0" i="0" u="none" strike="noStrike" baseline="0" dirty="0">
-              <a:latin typeface="AdobeMyungjoStd-Medium"/>
-            </a:endParaRPr>
-          </a:p>
-          <a:p>
-            <a:r>
-              <a:rPr lang="ko-KR" altLang="en-US" sz="3000" b="0" i="0" u="none" strike="noStrike" baseline="30000" dirty="0">
-                <a:latin typeface="AdobeMyungjoStd-Medium"/>
-              </a:rPr>
-              <a:t>④</a:t>
-            </a:r>
-            <a:r>
-              <a:rPr lang="ko-KR" altLang="en-US" sz="3000" b="0" i="0" u="none" strike="noStrike" baseline="30000" dirty="0">
-                <a:latin typeface="Times New Roman" panose="02020603050405020304" pitchFamily="18" charset="0"/>
-              </a:rPr>
-              <a:t> </a:t>
-            </a:r>
-            <a:r>
-              <a:rPr lang="en-US" altLang="ko-KR" sz="3000" b="0" i="0" u="none" strike="noStrike" baseline="30000" dirty="0">
-                <a:latin typeface="Times New Roman" panose="02020603050405020304" pitchFamily="18" charset="0"/>
-              </a:rPr>
-              <a:t>A Magic System: Fantasy</a:t>
-            </a:r>
-            <a:r>
-              <a:rPr lang="ko-KR" altLang="en-US" sz="3000" b="0" i="0" u="none" strike="noStrike" baseline="30000" dirty="0">
-                <a:latin typeface="Times New Roman" panose="02020603050405020304" pitchFamily="18" charset="0"/>
-              </a:rPr>
-              <a:t>’</a:t>
-            </a:r>
-            <a:r>
-              <a:rPr lang="en-US" altLang="ko-KR" sz="3000" b="0" i="0" u="none" strike="noStrike" baseline="30000" dirty="0">
-                <a:latin typeface="Times New Roman" panose="02020603050405020304" pitchFamily="18" charset="0"/>
-              </a:rPr>
-              <a:t>s Essential Element</a:t>
-            </a:r>
-            <a:r>
-              <a:rPr lang="ko-KR" altLang="en-US" sz="3000" b="0" i="0" u="none" strike="noStrike" baseline="30000" dirty="0">
-                <a:latin typeface="AdobeMyungjoStd-Medium"/>
-              </a:rPr>
-              <a:t>	</a:t>
-            </a:r>
-            <a:endParaRPr lang="ko-KR" altLang="en-US" sz="3000" b="0" i="0" u="none" strike="noStrike" baseline="0" dirty="0">
-              <a:latin typeface="AdobeMyungjoStd-Medium"/>
-            </a:endParaRPr>
-          </a:p>
-        </p:txBody>
-      </p:sp>
-      <p:sp>
-        <p:nvSpPr>
-          <p:cNvPr id="4" name="원형: 비어 있음 3">
-            <a:extLst>
-              <a:ext uri="{FF2B5EF4-FFF2-40B4-BE49-F238E27FC236}">
-                <a16:creationId xmlns:a16="http://schemas.microsoft.com/office/drawing/2014/main" id="{3DB66AE1-F884-CCD0-774C-381C42BFEB84}"/>
-              </a:ext>
-            </a:extLst>
-          </p:cNvPr>
-          <p:cNvSpPr/>
-          <p:nvPr/>
-        </p:nvSpPr>
-        <p:spPr>
-          <a:xfrm>
-            <a:off x="420624" y="3813048"/>
-            <a:ext cx="411480" cy="411480"/>
-          </a:xfrm>
-          <a:prstGeom prst="donut">
-            <a:avLst>
-              <a:gd name="adj" fmla="val 5471"/>
-            </a:avLst>
-          </a:prstGeom>
-          <a:solidFill>
-            <a:srgbClr val="FFFF00"/>
-          </a:solidFill>
-          <a:ln>
-            <a:solidFill>
-              <a:srgbClr val="FFFF00"/>
-            </a:solidFill>
-          </a:ln>
-        </p:spPr>
-        <p:style>
-          <a:lnRef idx="2">
-            <a:schemeClr val="accent1">
-              <a:shade val="15000"/>
-            </a:schemeClr>
-          </a:lnRef>
-          <a:fillRef idx="1">
-            <a:schemeClr val="accent1"/>
-          </a:fillRef>
-          <a:effectRef idx="0">
-            <a:schemeClr val="accent1"/>
-          </a:effectRef>
-          <a:fontRef idx="minor">
-            <a:schemeClr val="lt1"/>
-          </a:fontRef>
-        </p:style>
-        <p:txBody>
-          <a:bodyPr rtlCol="0" anchor="ctr"/>
-          <a:lstStyle/>
-          <a:p>
-            <a:pPr algn="ctr"/>
-            <a:endParaRPr lang="ko-KR" altLang="en-US">
-              <a:solidFill>
-                <a:schemeClr val="tx1"/>
-              </a:solidFill>
             </a:endParaRPr>
           </a:p>
         </p:txBody>
@@ -1369,84 +1131,6 @@
   <p:clrMapOvr>
     <a:masterClrMapping/>
   </p:clrMapOvr>
-  <p:timing>
-    <p:tnLst>
-      <p:par>
-        <p:cTn id="1" dur="indefinite" restart="never" nodeType="tmRoot">
-          <p:childTnLst>
-            <p:seq concurrent="1" nextAc="seek">
-              <p:cTn id="2" dur="indefinite" nodeType="mainSeq">
-                <p:childTnLst>
-                  <p:par>
-                    <p:cTn id="3" fill="hold">
-                      <p:stCondLst>
-                        <p:cond delay="indefinite"/>
-                      </p:stCondLst>
-                      <p:childTnLst>
-                        <p:par>
-                          <p:cTn id="4" fill="hold">
-                            <p:stCondLst>
-                              <p:cond delay="0"/>
-                            </p:stCondLst>
-                            <p:childTnLst>
-                              <p:par>
-                                <p:cTn id="5" presetID="1" presetClass="entr" presetSubtype="0" fill="hold" grpId="0" nodeType="clickEffect">
-                                  <p:stCondLst>
-                                    <p:cond delay="0"/>
-                                  </p:stCondLst>
-                                  <p:childTnLst>
-                                    <p:set>
-                                      <p:cBhvr>
-                                        <p:cTn id="6" dur="1" fill="hold">
-                                          <p:stCondLst>
-                                            <p:cond delay="0"/>
-                                          </p:stCondLst>
-                                        </p:cTn>
-                                        <p:tgtEl>
-                                          <p:spTgt spid="4"/>
-                                        </p:tgtEl>
-                                        <p:attrNameLst>
-                                          <p:attrName>style.visibility</p:attrName>
-                                        </p:attrNameLst>
-                                      </p:cBhvr>
-                                      <p:to>
-                                        <p:strVal val="visible"/>
-                                      </p:to>
-                                    </p:set>
-                                  </p:childTnLst>
-                                </p:cTn>
-                              </p:par>
-                            </p:childTnLst>
-                          </p:cTn>
-                        </p:par>
-                      </p:childTnLst>
-                    </p:cTn>
-                  </p:par>
-                </p:childTnLst>
-              </p:cTn>
-              <p:prevCondLst>
-                <p:cond evt="onPrev" delay="0">
-                  <p:tgtEl>
-                    <p:sldTgt/>
-                  </p:tgtEl>
-                </p:cond>
-              </p:prevCondLst>
-              <p:nextCondLst>
-                <p:cond evt="onNext" delay="0">
-                  <p:tgtEl>
-                    <p:sldTgt/>
-                  </p:tgtEl>
-                </p:cond>
-              </p:nextCondLst>
-            </p:seq>
-          </p:childTnLst>
-        </p:cTn>
-      </p:par>
-    </p:tnLst>
-    <p:bldLst>
-      <p:bldP spid="4" grpId="0" animBg="1"/>
-    </p:bldLst>
-  </p:timing>
 </p:sld>
 </file>
 
@@ -1482,7 +1166,7 @@
         <p:spPr>
           <a:xfrm>
             <a:off x="539496" y="1669548"/>
-            <a:ext cx="7242048" cy="2862322"/>
+            <a:ext cx="7242048" cy="553998"/>
           </a:xfrm>
           <a:prstGeom prst="rect">
             <a:avLst/>
@@ -1499,200 +1183,10 @@
               <a:rPr lang="en-US" altLang="ko-KR" sz="3000" b="0" i="0" u="none" strike="noStrike" baseline="30000" dirty="0">
                 <a:latin typeface="Times New Roman" panose="02020603050405020304" pitchFamily="18" charset="0"/>
               </a:rPr>
-              <a:t>2. Which of the following is referred to by (A)?</a:t>
-            </a:r>
-            <a:r>
-              <a:rPr lang="ko-KR" altLang="en-US" sz="3000" b="0" i="0" u="none" strike="noStrike" baseline="30000" dirty="0">
-                <a:latin typeface="AdobeMyungjoStd-Medium"/>
-              </a:rPr>
-              <a:t>	</a:t>
+              <a:t>template</a:t>
             </a:r>
             <a:endParaRPr lang="ko-KR" altLang="en-US" sz="3000" b="0" i="0" u="none" strike="noStrike" baseline="0" dirty="0">
               <a:latin typeface="AdobeMyungjoStd-Medium"/>
-            </a:endParaRPr>
-          </a:p>
-          <a:p>
-            <a:r>
-              <a:rPr lang="ko-KR" altLang="en-US" sz="3000" b="0" i="0" u="none" strike="noStrike" baseline="0" dirty="0">
-                <a:latin typeface="AdobeMyungjoStd-Medium"/>
-              </a:rPr>
-              <a:t>	</a:t>
-            </a:r>
-          </a:p>
-          <a:p>
-            <a:r>
-              <a:rPr lang="ko-KR" altLang="en-US" sz="3000" b="0" i="0" u="none" strike="noStrike" baseline="30000" dirty="0">
-                <a:latin typeface="AdobeMyungjoStd-Medium"/>
-              </a:rPr>
-              <a:t>①</a:t>
-            </a:r>
-            <a:r>
-              <a:rPr lang="ko-KR" altLang="en-US" sz="3000" b="0" i="0" u="none" strike="noStrike" baseline="30000" dirty="0">
-                <a:latin typeface="Times New Roman" panose="02020603050405020304" pitchFamily="18" charset="0"/>
-              </a:rPr>
-              <a:t> </a:t>
-            </a:r>
-            <a:r>
-              <a:rPr lang="en-US" altLang="ko-KR" sz="3000" b="0" i="0" u="none" strike="noStrike" baseline="30000" dirty="0">
-                <a:latin typeface="Times New Roman" panose="02020603050405020304" pitchFamily="18" charset="0"/>
-              </a:rPr>
-              <a:t>Fantasy fiction</a:t>
-            </a:r>
-            <a:r>
-              <a:rPr lang="ko-KR" altLang="en-US" sz="3000" b="0" i="0" u="none" strike="noStrike" baseline="30000" dirty="0">
-                <a:latin typeface="AdobeMyungjoStd-Medium"/>
-              </a:rPr>
-              <a:t>	</a:t>
-            </a:r>
-            <a:endParaRPr lang="ko-KR" altLang="en-US" sz="3000" b="0" i="0" u="none" strike="noStrike" baseline="0" dirty="0">
-              <a:latin typeface="AdobeMyungjoStd-Medium"/>
-            </a:endParaRPr>
-          </a:p>
-          <a:p>
-            <a:r>
-              <a:rPr lang="ko-KR" altLang="en-US" sz="3000" b="0" i="0" u="none" strike="noStrike" baseline="30000" dirty="0">
-                <a:latin typeface="AdobeMyungjoStd-Medium"/>
-              </a:rPr>
-              <a:t>②</a:t>
-            </a:r>
-            <a:r>
-              <a:rPr lang="ko-KR" altLang="en-US" sz="3000" b="0" i="0" u="none" strike="noStrike" baseline="30000" dirty="0">
-                <a:latin typeface="Times New Roman" panose="02020603050405020304" pitchFamily="18" charset="0"/>
-              </a:rPr>
-              <a:t> </a:t>
-            </a:r>
-            <a:r>
-              <a:rPr lang="en-US" altLang="ko-KR" sz="3000" b="0" i="0" u="none" strike="noStrike" baseline="30000" dirty="0">
-                <a:latin typeface="Times New Roman" panose="02020603050405020304" pitchFamily="18" charset="0"/>
-              </a:rPr>
-              <a:t>Market report</a:t>
-            </a:r>
-            <a:r>
-              <a:rPr lang="ko-KR" altLang="en-US" sz="3000" b="0" i="0" u="none" strike="noStrike" baseline="30000" dirty="0">
-                <a:latin typeface="AdobeMyungjoStd-Medium"/>
-              </a:rPr>
-              <a:t>	</a:t>
-            </a:r>
-            <a:endParaRPr lang="ko-KR" altLang="en-US" sz="3000" b="0" i="0" u="none" strike="noStrike" baseline="0" dirty="0">
-              <a:latin typeface="AdobeMyungjoStd-Medium"/>
-            </a:endParaRPr>
-          </a:p>
-          <a:p>
-            <a:r>
-              <a:rPr lang="ko-KR" altLang="en-US" sz="3000" b="0" i="0" u="none" strike="noStrike" baseline="30000" dirty="0">
-                <a:latin typeface="AdobeMyungjoStd-Medium"/>
-              </a:rPr>
-              <a:t>③</a:t>
-            </a:r>
-            <a:r>
-              <a:rPr lang="ko-KR" altLang="en-US" sz="3000" b="0" i="0" u="none" strike="noStrike" baseline="30000" dirty="0">
-                <a:latin typeface="Times New Roman" panose="02020603050405020304" pitchFamily="18" charset="0"/>
-              </a:rPr>
-              <a:t> </a:t>
-            </a:r>
-            <a:r>
-              <a:rPr lang="en-US" altLang="ko-KR" sz="3000" b="0" i="0" u="none" strike="noStrike" baseline="30000" dirty="0">
-                <a:latin typeface="Times New Roman" panose="02020603050405020304" pitchFamily="18" charset="0"/>
-              </a:rPr>
-              <a:t>System manual</a:t>
-            </a:r>
-            <a:r>
-              <a:rPr lang="ko-KR" altLang="en-US" sz="3000" b="0" i="0" u="none" strike="noStrike" baseline="30000" dirty="0">
-                <a:latin typeface="AdobeMyungjoStd-Medium"/>
-              </a:rPr>
-              <a:t>	</a:t>
-            </a:r>
-            <a:endParaRPr lang="ko-KR" altLang="en-US" sz="3000" b="0" i="0" u="none" strike="noStrike" baseline="0" dirty="0">
-              <a:latin typeface="AdobeMyungjoStd-Medium"/>
-            </a:endParaRPr>
-          </a:p>
-          <a:p>
-            <a:r>
-              <a:rPr lang="ko-KR" altLang="en-US" sz="3000" b="0" i="0" u="none" strike="noStrike" baseline="30000" dirty="0">
-                <a:latin typeface="AdobeMyungjoStd-Medium"/>
-              </a:rPr>
-              <a:t>④</a:t>
-            </a:r>
-            <a:r>
-              <a:rPr lang="ko-KR" altLang="en-US" sz="3000" b="0" i="0" u="none" strike="noStrike" baseline="30000" dirty="0">
-                <a:latin typeface="Times New Roman" panose="02020603050405020304" pitchFamily="18" charset="0"/>
-              </a:rPr>
-              <a:t> </a:t>
-            </a:r>
-            <a:r>
-              <a:rPr lang="en-US" altLang="ko-KR" sz="3000" b="0" i="0" u="none" strike="noStrike" baseline="30000" dirty="0">
-                <a:latin typeface="Times New Roman" panose="02020603050405020304" pitchFamily="18" charset="0"/>
-              </a:rPr>
-              <a:t>Book review</a:t>
-            </a:r>
-            <a:r>
-              <a:rPr lang="ko-KR" altLang="en-US" sz="3000" b="0" i="0" u="none" strike="noStrike" baseline="30000" dirty="0">
-                <a:latin typeface="AdobeMyungjoStd-Medium"/>
-              </a:rPr>
-              <a:t>	</a:t>
-            </a:r>
-            <a:endParaRPr lang="ko-KR" altLang="en-US" sz="3000" b="0" i="0" u="none" strike="noStrike" baseline="0" dirty="0">
-              <a:latin typeface="AdobeMyungjoStd-Medium"/>
-            </a:endParaRPr>
-          </a:p>
-        </p:txBody>
-      </p:sp>
-      <p:sp>
-        <p:nvSpPr>
-          <p:cNvPr id="4" name="원형: 비어 있음 3">
-            <a:extLst>
-              <a:ext uri="{FF2B5EF4-FFF2-40B4-BE49-F238E27FC236}">
-                <a16:creationId xmlns:a16="http://schemas.microsoft.com/office/drawing/2014/main" id="{186F57F5-9805-87FB-9E5B-3DB74255A146}"/>
-              </a:ext>
-            </a:extLst>
-          </p:cNvPr>
-          <p:cNvSpPr/>
-          <p:nvPr/>
-        </p:nvSpPr>
-        <p:spPr>
-          <a:xfrm>
-            <a:off x="539496" y="2596896"/>
-            <a:ext cx="411480" cy="411480"/>
-          </a:xfrm>
-          <a:prstGeom prst="donut">
-            <a:avLst>
-              <a:gd name="adj" fmla="val 5471"/>
-            </a:avLst>
-          </a:prstGeom>
-          <a:solidFill>
-            <a:srgbClr val="FFFF00"/>
-          </a:solidFill>
-          <a:ln>
-            <a:solidFill>
-              <a:srgbClr val="FFFF00"/>
-            </a:solidFill>
-          </a:ln>
-        </p:spPr>
-        <p:style>
-          <a:lnRef idx="2">
-            <a:schemeClr val="accent1">
-              <a:shade val="15000"/>
-            </a:schemeClr>
-          </a:lnRef>
-          <a:fillRef idx="1">
-            <a:schemeClr val="accent1"/>
-          </a:fillRef>
-          <a:effectRef idx="0">
-            <a:schemeClr val="accent1"/>
-          </a:effectRef>
-          <a:fontRef idx="minor">
-            <a:schemeClr val="lt1"/>
-          </a:fontRef>
-        </p:style>
-        <p:txBody>
-          <a:bodyPr rtlCol="0" anchor="ctr"/>
-          <a:lstStyle/>
-          <a:p>
-            <a:pPr algn="ctr"/>
-            <a:endParaRPr lang="ko-KR" altLang="en-US">
-              <a:solidFill>
-                <a:schemeClr val="tx1"/>
-              </a:solidFill>
             </a:endParaRPr>
           </a:p>
         </p:txBody>
@@ -1707,84 +1201,6 @@
   <p:clrMapOvr>
     <a:masterClrMapping/>
   </p:clrMapOvr>
-  <p:timing>
-    <p:tnLst>
-      <p:par>
-        <p:cTn id="1" dur="indefinite" restart="never" nodeType="tmRoot">
-          <p:childTnLst>
-            <p:seq concurrent="1" nextAc="seek">
-              <p:cTn id="2" dur="indefinite" nodeType="mainSeq">
-                <p:childTnLst>
-                  <p:par>
-                    <p:cTn id="3" fill="hold">
-                      <p:stCondLst>
-                        <p:cond delay="indefinite"/>
-                      </p:stCondLst>
-                      <p:childTnLst>
-                        <p:par>
-                          <p:cTn id="4" fill="hold">
-                            <p:stCondLst>
-                              <p:cond delay="0"/>
-                            </p:stCondLst>
-                            <p:childTnLst>
-                              <p:par>
-                                <p:cTn id="5" presetID="1" presetClass="entr" presetSubtype="0" fill="hold" grpId="0" nodeType="clickEffect">
-                                  <p:stCondLst>
-                                    <p:cond delay="0"/>
-                                  </p:stCondLst>
-                                  <p:childTnLst>
-                                    <p:set>
-                                      <p:cBhvr>
-                                        <p:cTn id="6" dur="1" fill="hold">
-                                          <p:stCondLst>
-                                            <p:cond delay="0"/>
-                                          </p:stCondLst>
-                                        </p:cTn>
-                                        <p:tgtEl>
-                                          <p:spTgt spid="4"/>
-                                        </p:tgtEl>
-                                        <p:attrNameLst>
-                                          <p:attrName>style.visibility</p:attrName>
-                                        </p:attrNameLst>
-                                      </p:cBhvr>
-                                      <p:to>
-                                        <p:strVal val="visible"/>
-                                      </p:to>
-                                    </p:set>
-                                  </p:childTnLst>
-                                </p:cTn>
-                              </p:par>
-                            </p:childTnLst>
-                          </p:cTn>
-                        </p:par>
-                      </p:childTnLst>
-                    </p:cTn>
-                  </p:par>
-                </p:childTnLst>
-              </p:cTn>
-              <p:prevCondLst>
-                <p:cond evt="onPrev" delay="0">
-                  <p:tgtEl>
-                    <p:sldTgt/>
-                  </p:tgtEl>
-                </p:cond>
-              </p:prevCondLst>
-              <p:nextCondLst>
-                <p:cond evt="onNext" delay="0">
-                  <p:tgtEl>
-                    <p:sldTgt/>
-                  </p:tgtEl>
-                </p:cond>
-              </p:nextCondLst>
-            </p:seq>
-          </p:childTnLst>
-        </p:cTn>
-      </p:par>
-    </p:tnLst>
-    <p:bldLst>
-      <p:bldP spid="4" grpId="0" animBg="1"/>
-    </p:bldLst>
-  </p:timing>
 </p:sld>
 </file>
 
@@ -1838,7 +1254,7 @@
               <a:rPr lang="en-US" altLang="ko-KR" sz="3000" b="0" i="0" u="none" strike="noStrike" baseline="30000" dirty="0">
                 <a:latin typeface="Times New Roman" panose="02020603050405020304" pitchFamily="18" charset="0"/>
               </a:rPr>
-              <a:t>This is where you can really set your story apart from others in the genre.</a:t>
+              <a:t>template</a:t>
             </a:r>
             <a:endParaRPr lang="ko-KR" altLang="en-US" sz="3000" b="0" i="0" u="none" strike="noStrike" baseline="30000" dirty="0">
               <a:latin typeface="Times New Roman" panose="02020603050405020304" pitchFamily="18" charset="0"/>
@@ -2093,7 +1509,7 @@
         <p:spPr>
           <a:xfrm>
             <a:off x="708660" y="2282875"/>
-            <a:ext cx="7872984" cy="2691571"/>
+            <a:ext cx="7872984" cy="844911"/>
           </a:xfrm>
           <a:prstGeom prst="rect">
             <a:avLst/>
@@ -2115,31 +1531,7 @@
               <a:rPr lang="en-US" altLang="ko-KR" sz="3000" b="0" i="0" u="none" strike="noStrike" baseline="30000" dirty="0">
                 <a:latin typeface="Times New Roman" panose="02020603050405020304" pitchFamily="18" charset="0"/>
               </a:rPr>
-              <a:t>For a story to be considered </a:t>
-            </a:r>
-            <a:r>
-              <a:rPr lang="ko-KR" altLang="en-US" sz="3000" b="0" i="0" u="none" strike="noStrike" baseline="30000" dirty="0">
-                <a:latin typeface="Times New Roman" panose="02020603050405020304" pitchFamily="18" charset="0"/>
-              </a:rPr>
-              <a:t>‘</a:t>
-            </a:r>
-            <a:r>
-              <a:rPr lang="en-US" altLang="ko-KR" sz="3000" b="0" i="0" u="none" strike="noStrike" baseline="30000" dirty="0">
-                <a:latin typeface="Times New Roman" panose="02020603050405020304" pitchFamily="18" charset="0"/>
-              </a:rPr>
-              <a:t>fantasy,</a:t>
-            </a:r>
-            <a:r>
-              <a:rPr lang="ko-KR" altLang="en-US" sz="3000" b="0" i="0" u="none" strike="noStrike" baseline="30000" dirty="0">
-                <a:latin typeface="Times New Roman" panose="02020603050405020304" pitchFamily="18" charset="0"/>
-              </a:rPr>
-              <a:t>’ </a:t>
-            </a:r>
-            <a:r>
-              <a:rPr lang="en-US" altLang="ko-KR" sz="3000" b="0" i="0" u="none" strike="noStrike" baseline="30000" dirty="0">
-                <a:latin typeface="Times New Roman" panose="02020603050405020304" pitchFamily="18" charset="0"/>
-              </a:rPr>
-              <a:t>it needs to contain some sort of magic system, in short, things that occur or exist in your story that cannot exist in the real world.</a:t>
+              <a:t>template</a:t>
             </a:r>
             <a:endParaRPr lang="ko-KR" altLang="en-US" sz="3000" b="0" i="0" u="none" strike="noStrike" baseline="30000" dirty="0">
               <a:latin typeface="Times New Roman" panose="02020603050405020304" pitchFamily="18" charset="0"/>

--- a/backend/template.pptx
+++ b/backend/template.pptx
@@ -471,6 +471,90 @@
 </p:notesMaster>
 </file>
 
+<file path=ppt/notesSlides/notesSlide1.xml><?xml version="1.0" encoding="utf-8"?>
+<p:notes xmlns:a="http://schemas.openxmlformats.org/drawingml/2006/main" xmlns:r="http://schemas.openxmlformats.org/officeDocument/2006/relationships" xmlns:p="http://schemas.openxmlformats.org/presentationml/2006/main">
+  <p:cSld>
+    <p:spTree>
+      <p:nvGrpSpPr>
+        <p:cNvPr id="1" name=""/>
+        <p:cNvGrpSpPr/>
+        <p:nvPr/>
+      </p:nvGrpSpPr>
+      <p:grpSpPr>
+        <a:xfrm>
+          <a:off x="0" y="0"/>
+          <a:ext cx="0" cy="0"/>
+          <a:chOff x="0" y="0"/>
+          <a:chExt cx="0" cy="0"/>
+        </a:xfrm>
+      </p:grpSpPr>
+      <p:sp>
+        <p:nvSpPr>
+          <p:cNvPr id="2" name="슬라이드 이미지 개체 틀 1"/>
+          <p:cNvSpPr>
+            <a:spLocks noGrp="1" noRot="1" noChangeAspect="1"/>
+          </p:cNvSpPr>
+          <p:nvPr>
+            <p:ph type="sldImg"/>
+          </p:nvPr>
+        </p:nvSpPr>
+        <p:spPr/>
+      </p:sp>
+      <p:sp>
+        <p:nvSpPr>
+          <p:cNvPr id="3" name="슬라이드 노트 개체 틀 2"/>
+          <p:cNvSpPr>
+            <a:spLocks noGrp="1"/>
+          </p:cNvSpPr>
+          <p:nvPr>
+            <p:ph type="body" idx="1"/>
+          </p:nvPr>
+        </p:nvSpPr>
+        <p:spPr/>
+        <p:txBody>
+          <a:bodyPr/>
+          <a:lstStyle/>
+          <a:p>
+            <a:endParaRPr kumimoji="1" lang="ko-KR" altLang="en-US" dirty="0"/>
+          </a:p>
+        </p:txBody>
+      </p:sp>
+      <p:sp>
+        <p:nvSpPr>
+          <p:cNvPr id="4" name="슬라이드 번호 개체 틀 3"/>
+          <p:cNvSpPr>
+            <a:spLocks noGrp="1"/>
+          </p:cNvSpPr>
+          <p:nvPr>
+            <p:ph type="sldNum" sz="quarter" idx="5"/>
+          </p:nvPr>
+        </p:nvSpPr>
+        <p:spPr/>
+        <p:txBody>
+          <a:bodyPr/>
+          <a:lstStyle/>
+          <a:p>
+            <a:fld id="{873ABBE3-E69F-4411-92C8-232DE0273799}" type="slidenum">
+              <a:rPr lang="ko-KR" altLang="en-US" smtClean="0"/>
+              <a:t>1</a:t>
+            </a:fld>
+            <a:endParaRPr lang="ko-KR" altLang="en-US"/>
+          </a:p>
+        </p:txBody>
+      </p:sp>
+    </p:spTree>
+    <p:extLst>
+      <p:ext uri="{BB962C8B-B14F-4D97-AF65-F5344CB8AC3E}">
+        <p14:creationId xmlns:p14="http://schemas.microsoft.com/office/powerpoint/2010/main" val="3665087942"/>
+      </p:ext>
+    </p:extLst>
+  </p:cSld>
+  <p:clrMapOvr>
+    <a:masterClrMapping/>
+  </p:clrMapOvr>
+</p:notes>
+</file>
+
 <file path=ppt/slideLayouts/slideLayout1.xml><?xml version="1.0" encoding="utf-8"?>
 <p:sldLayout xmlns:a="http://schemas.openxmlformats.org/drawingml/2006/main" xmlns:r="http://schemas.openxmlformats.org/officeDocument/2006/relationships" xmlns:p="http://schemas.openxmlformats.org/presentationml/2006/main" type="blank" preserve="1">
   <p:cSld name="빈 화면">
@@ -1036,7 +1120,7 @@
                 </a:spcBef>
               </a:pPr>
               <a:r>
-                <a:rPr lang="en-US" sz="2376" u="none" strike="noStrike" spc="-38" dirty="0">
+                <a:rPr lang="en-US" sz="2376" spc="-38" dirty="0">
                   <a:solidFill>
                     <a:srgbClr val="794A4A"/>
                   </a:solidFill>
@@ -1045,8 +1129,17 @@
                   <a:cs typeface="Pretendard ExtraBold" panose="02000903000000020004" pitchFamily="50" charset="-127"/>
                   <a:sym typeface="Jua"/>
                 </a:rPr>
-                <a:t>1</a:t>
+                <a:t>#</a:t>
               </a:r>
+              <a:endParaRPr lang="en-US" sz="2376" u="none" strike="noStrike" spc="-38" dirty="0">
+                <a:solidFill>
+                  <a:srgbClr val="794A4A"/>
+                </a:solidFill>
+                <a:latin typeface="Pretendard ExtraBold" panose="02000903000000020004" pitchFamily="50" charset="-127"/>
+                <a:ea typeface="Pretendard ExtraBold" panose="02000903000000020004" pitchFamily="50" charset="-127"/>
+                <a:cs typeface="Pretendard ExtraBold" panose="02000903000000020004" pitchFamily="50" charset="-127"/>
+                <a:sym typeface="Jua"/>
+              </a:endParaRPr>
             </a:p>
           </p:txBody>
         </p:sp>
@@ -1357,7 +1450,7 @@
           <a:p>
             <a:r>
               <a:rPr lang="en-US" altLang="ko-KR" sz="3000" b="1" dirty="0"/>
-              <a:t>mission</a:t>
+              <a:t>Mission</a:t>
             </a:r>
             <a:endParaRPr lang="ko-KR" altLang="en-US" sz="3000" b="1" dirty="0"/>
           </a:p>
